--- a/decks/maths-sequences/maths-sequences_ch4_continue-non-linear.pptx
+++ b/decks/maths-sequences/maths-sequences_ch4_continue-non-linear.pptx
@@ -122,29 +122,29 @@
   <p:extLst>
     <p:ext uri="{521415D9-36F7-43E2-AB2F-B90AF26B5E84}">
       <p14:sectionLst xmlns:p14="http://schemas.microsoft.com/office/powerpoint/2010/main">
-        <p14:section name="Opening" id="{ac92ff57-ce32-4960-77c0-9efd7dcf3dbc}">
+        <p14:section name="Opening" id="{46f36372-fb7b-e036-2b54-686439ade5dd}">
           <p14:sldIdLst>
             <p14:sldId id="256"/>
           </p14:sldIdLst>
         </p14:section>
-        <p14:section name="Gate" id="{f79f531b-5df7-53d9-6eff-542e310cb62b}">
+        <p14:section name="Gate" id="{88215a09-7a97-8200-b384-d3ace8cd2d8a}">
           <p14:sldIdLst>
             <p14:sldId id="257"/>
             <p14:sldId id="258"/>
           </p14:sldIdLst>
         </p14:section>
-        <p14:section name="Pre-teach" id="{0a825447-65bf-0529-ac04-5ff305dd0676}">
+        <p14:section name="Pre-teach" id="{4b4f0597-49e0-a200-b67a-33cd1cb0dcbb}">
           <p14:sldIdLst>
             <p14:sldId id="259"/>
           </p14:sldIdLst>
         </p14:section>
-        <p14:section name="Read-along" id="{9cdc9da1-85ef-ab05-ebba-c0e95beb3ebc}">
+        <p14:section name="Read-along" id="{7555b75e-ddfe-2b2c-e67d-5aa16a34d8e7}">
           <p14:sldIdLst>
             <p14:sldId id="260"/>
             <p14:sldId id="261"/>
           </p14:sldIdLst>
         </p14:section>
-        <p14:section name="Teach" id="{ca77b09e-c4b7-8d32-8e74-b90632b4a004}">
+        <p14:section name="Teach" id="{4f5b50f6-c82e-07c9-960e-fad5ad5dbf30}">
           <p14:sldIdLst>
             <p14:sldId id="262"/>
             <p14:sldId id="263"/>
@@ -152,18 +152,18 @@
             <p14:sldId id="265"/>
           </p14:sldIdLst>
         </p14:section>
-        <p14:section name="Routes" id="{f921b0c8-6e8e-8cd3-3748-63a1953f12a6}">
+        <p14:section name="Routes" id="{49776c51-8ae7-178a-8419-b05348439fa1}">
           <p14:sldIdLst>
             <p14:sldId id="266"/>
             <p14:sldId id="267"/>
           </p14:sldIdLst>
         </p14:section>
-        <p14:section name="Close" id="{4f2da81f-585d-a46d-07a4-638aa04ad14f}">
+        <p14:section name="Close" id="{e791ed6c-9bea-9420-958b-ef5db338ee0a}">
           <p14:sldIdLst>
             <p14:sldId id="268"/>
           </p14:sldIdLst>
         </p14:section>
-        <p14:section name="Answers" id="{8a09ae87-de49-314e-55cb-346ae7268b37}">
+        <p14:section name="Answers" id="{46d42ef9-91df-ffdb-51e4-73336a0d8cab}">
           <p14:sldIdLst>
             <p14:sldId id="269"/>
             <p14:sldId id="270"/>
@@ -1130,7 +1130,7 @@
             <a:r>
               <a:rPr lang="en-US" dirty="0"/>
               <a:t>Answers — task 2: Halving. Reveal the answer; pupils mark their own work in a different colour, then read the "why" together. Same destination for every lane, so one answer serves the whole class.
-Answer: A   3
+Answer: B   3
 Why: 24 is the 3rd term. Halve three more times: 12 is the 4th, 6 is the 5th and 3 is the 6th.
 Ask a Support pupil to explain one step, and a Stretch pupil to share their extension.</a:t>
             </a:r>
@@ -1313,7 +1313,7 @@
               <a:rPr lang="en-US" dirty="0"/>
               <a:t>Do now — retrieval. Silent, no notes, no help: recall comes before any support. Give about four minutes.
 1. A sequence is made by doubling the previous term: 5, 10, 20, … What is the 5th term?  →  80
-2. Which of these sequences is geometric?  →  B   2, 4, 8, 16
+2. Which of these sequences is geometric?  →  A   2, 4, 8, 16
 3. In the sequence 2, 4, 7, 11, 16 the differences are 2, 3, 4 and 5, so the sequence is ___.  →  non-linear
 Circulate: who gets 3/3 (Stretch route), 2/3 (Core), 0–1 (Support)? Use this to route pupils later in the lesson.</a:t>
             </a:r>
@@ -1405,7 +1405,7 @@
               <a:rPr lang="en-US" dirty="0"/>
               <a:t>Answers — pupils mark their own in a different colour, then hands up for 3/3, 2/3, 1/3.
 1. 80. Double 20 to get 40, the 4th term. Double again to get 80, the 5th term.
-2. B   2, 4, 8, 16. In 2, 4, 8, 16 each term is double the previous term. Multiplying by the same number each time makes a geometric sequence.
+2. A   2, 4, 8, 16. In 2, 4, 8, 16 each term is double the previous term. Multiplying by the same number each time makes a geometric sequence.
 3. non-linear. The differences change, so the sequence is non-linear.
 Say the route each score points to: 3/3 Stretch, 2/3 Core, 0–1 Support. Pupils may choose to move up.</a:t>
             </a:r>
@@ -5794,6 +5794,34 @@
                 <a:ea typeface="Calibri" pitchFamily="34" charset="-122"/>
                 <a:cs typeface="Calibri" pitchFamily="34" charset="-120"/>
               </a:rPr>
+              <a:t>12      </a:t>
+            </a:r>
+            <a:pPr algn="ctr" indent="0" marL="0">
+              <a:buNone/>
+            </a:pPr>
+            <a:r>
+              <a:rPr lang="en-US" sz="1800" b="1" dirty="0">
+                <a:solidFill>
+                  <a:srgbClr val="B8862B"/>
+                </a:solidFill>
+                <a:latin typeface="Calibri" pitchFamily="34" charset="0"/>
+                <a:ea typeface="Calibri" pitchFamily="34" charset="-122"/>
+                <a:cs typeface="Calibri" pitchFamily="34" charset="-120"/>
+              </a:rPr>
+              <a:t>B  </a:t>
+            </a:r>
+            <a:pPr algn="ctr" indent="0" marL="0">
+              <a:buNone/>
+            </a:pPr>
+            <a:r>
+              <a:rPr lang="en-US" sz="1800" dirty="0">
+                <a:solidFill>
+                  <a:srgbClr val="1E2229"/>
+                </a:solidFill>
+                <a:latin typeface="Calibri" pitchFamily="34" charset="0"/>
+                <a:ea typeface="Calibri" pitchFamily="34" charset="-122"/>
+                <a:cs typeface="Calibri" pitchFamily="34" charset="-120"/>
+              </a:rPr>
               <a:t>3      </a:t>
             </a:r>
             <a:pPr algn="ctr" indent="0" marL="0">
@@ -5808,7 +5836,7 @@
                 <a:ea typeface="Calibri" pitchFamily="34" charset="-122"/>
                 <a:cs typeface="Calibri" pitchFamily="34" charset="-120"/>
               </a:rPr>
-              <a:t>B  </a:t>
+              <a:t>C  </a:t>
             </a:r>
             <a:pPr algn="ctr" indent="0" marL="0">
               <a:buNone/>
@@ -5836,7 +5864,7 @@
                 <a:ea typeface="Calibri" pitchFamily="34" charset="-122"/>
                 <a:cs typeface="Calibri" pitchFamily="34" charset="-120"/>
               </a:rPr>
-              <a:t>C  </a:t>
+              <a:t>D  </a:t>
             </a:r>
             <a:pPr algn="ctr" indent="0" marL="0">
               <a:buNone/>
@@ -5850,35 +5878,7 @@
                 <a:ea typeface="Calibri" pitchFamily="34" charset="-122"/>
                 <a:cs typeface="Calibri" pitchFamily="34" charset="-120"/>
               </a:rPr>
-              <a:t>1.5      </a:t>
-            </a:r>
-            <a:pPr algn="ctr" indent="0" marL="0">
-              <a:buNone/>
-            </a:pPr>
-            <a:r>
-              <a:rPr lang="en-US" sz="1800" b="1" dirty="0">
-                <a:solidFill>
-                  <a:srgbClr val="B8862B"/>
-                </a:solidFill>
-                <a:latin typeface="Calibri" pitchFamily="34" charset="0"/>
-                <a:ea typeface="Calibri" pitchFamily="34" charset="-122"/>
-                <a:cs typeface="Calibri" pitchFamily="34" charset="-120"/>
-              </a:rPr>
-              <a:t>D  </a:t>
-            </a:r>
-            <a:pPr algn="ctr" indent="0" marL="0">
-              <a:buNone/>
-            </a:pPr>
-            <a:r>
-              <a:rPr lang="en-US" sz="1800" dirty="0">
-                <a:solidFill>
-                  <a:srgbClr val="1E2229"/>
-                </a:solidFill>
-                <a:latin typeface="Calibri" pitchFamily="34" charset="0"/>
-                <a:ea typeface="Calibri" pitchFamily="34" charset="-122"/>
-                <a:cs typeface="Calibri" pitchFamily="34" charset="-120"/>
-              </a:rPr>
-              <a:t>12</a:t>
+              <a:t>1.5</a:t>
             </a:r>
             <a:endParaRPr lang="en-US" sz="2000" dirty="0"/>
           </a:p>
@@ -7695,7 +7695,7 @@
                 <a:ea typeface="Cambria" pitchFamily="34" charset="-122"/>
                 <a:cs typeface="Cambria" pitchFamily="34" charset="-120"/>
               </a:rPr>
-              <a:t>A   3</a:t>
+              <a:t>B   3</a:t>
             </a:r>
             <a:endParaRPr lang="en-US" sz="1800" dirty="0"/>
           </a:p>
@@ -8886,7 +8886,7 @@
                 <a:ea typeface="Calibri" pitchFamily="34" charset="-122"/>
                 <a:cs typeface="Calibri" pitchFamily="34" charset="-120"/>
               </a:rPr>
-              <a:t>2, 4, 6, 8</a:t>
+              <a:t>2, 4, 8, 16</a:t>
             </a:r>
             <a:endParaRPr lang="en-US" sz="2400" dirty="0"/>
           </a:p>
@@ -8923,7 +8923,7 @@
                 <a:ea typeface="Calibri" pitchFamily="34" charset="-122"/>
                 <a:cs typeface="Calibri" pitchFamily="34" charset="-120"/>
               </a:rPr>
-              <a:t>2, 4, 8, 16</a:t>
+              <a:t>2, 4, 6, 8</a:t>
             </a:r>
             <a:endParaRPr lang="en-US" sz="2400" dirty="0"/>
           </a:p>
@@ -9846,7 +9846,7 @@
                 <a:ea typeface="Calibri" pitchFamily="34" charset="-122"/>
                 <a:cs typeface="Calibri" pitchFamily="34" charset="-120"/>
               </a:rPr>
-              <a:t>B   2, 4, 8, 16</a:t>
+              <a:t>A   2, 4, 8, 16</a:t>
             </a:r>
             <a:endParaRPr lang="en-US" sz="2200" dirty="0"/>
           </a:p>

--- a/decks/maths-sequences/maths-sequences_ch4_continue-non-linear.pptx
+++ b/decks/maths-sequences/maths-sequences_ch4_continue-non-linear.pptx
@@ -122,29 +122,29 @@
   <p:extLst>
     <p:ext uri="{521415D9-36F7-43E2-AB2F-B90AF26B5E84}">
       <p14:sectionLst xmlns:p14="http://schemas.microsoft.com/office/powerpoint/2010/main">
-        <p14:section name="Opening" id="{46f36372-fb7b-e036-2b54-686439ade5dd}">
+        <p14:section name="Opening" id="{28cbabbe-8e9a-e4cc-946f-e0645adc054d}">
           <p14:sldIdLst>
             <p14:sldId id="256"/>
           </p14:sldIdLst>
         </p14:section>
-        <p14:section name="Gate" id="{88215a09-7a97-8200-b384-d3ace8cd2d8a}">
+        <p14:section name="Gate" id="{d69109c5-b563-43c1-2b11-b8d32894b4b8}">
           <p14:sldIdLst>
             <p14:sldId id="257"/>
             <p14:sldId id="258"/>
           </p14:sldIdLst>
         </p14:section>
-        <p14:section name="Pre-teach" id="{4b4f0597-49e0-a200-b67a-33cd1cb0dcbb}">
+        <p14:section name="Pre-teach" id="{a379a65a-7839-47c6-9eb5-44804b3918db}">
           <p14:sldIdLst>
             <p14:sldId id="259"/>
           </p14:sldIdLst>
         </p14:section>
-        <p14:section name="Read-along" id="{7555b75e-ddfe-2b2c-e67d-5aa16a34d8e7}">
+        <p14:section name="Read-along" id="{8c3f7d65-c891-581f-8bb1-5b2f7381cb84}">
           <p14:sldIdLst>
             <p14:sldId id="260"/>
             <p14:sldId id="261"/>
           </p14:sldIdLst>
         </p14:section>
-        <p14:section name="Teach" id="{4f5b50f6-c82e-07c9-960e-fad5ad5dbf30}">
+        <p14:section name="Teach" id="{d7d7e05f-4d95-8096-b258-f9dcab48af1a}">
           <p14:sldIdLst>
             <p14:sldId id="262"/>
             <p14:sldId id="263"/>
@@ -152,18 +152,18 @@
             <p14:sldId id="265"/>
           </p14:sldIdLst>
         </p14:section>
-        <p14:section name="Routes" id="{49776c51-8ae7-178a-8419-b05348439fa1}">
+        <p14:section name="Routes" id="{ca65d8a5-aa19-c917-d274-af743204762d}">
           <p14:sldIdLst>
             <p14:sldId id="266"/>
             <p14:sldId id="267"/>
           </p14:sldIdLst>
         </p14:section>
-        <p14:section name="Close" id="{e791ed6c-9bea-9420-958b-ef5db338ee0a}">
+        <p14:section name="Close" id="{7c0c90ba-c487-a123-a091-0fdf3af7e848}">
           <p14:sldIdLst>
             <p14:sldId id="268"/>
           </p14:sldIdLst>
         </p14:section>
-        <p14:section name="Answers" id="{46d42ef9-91df-ffdb-51e4-73336a0d8cab}">
+        <p14:section name="Answers" id="{c85262ac-8377-8fd2-848b-0265847edefc}">
           <p14:sldIdLst>
             <p14:sldId id="269"/>
             <p14:sldId id="270"/>
